--- a/gcn/gcn_report.pptx
+++ b/gcn/gcn_report.pptx
@@ -31,6 +31,7 @@
     <p:sldId id="279" r:id="rId30"/>
     <p:sldId id="280" r:id="rId31"/>
     <p:sldId id="281" r:id="rId32"/>
+    <p:sldId id="282" r:id="rId33"/>
   </p:sldIdLst>
   <p:sldSz cx="18288000" cy="10287000" type="screen4x3"/>
   <p:notesSz cx="6858000" cy="9144000"/>
@@ -9397,7 +9398,7 @@
                 <a:gridCol w="5943600"/>
                 <a:gridCol w="6858000"/>
               </a:tblGrid>
-              <a:tr h="670560">
+              <a:tr h="603504">
                 <a:tc>
                   <a:txBody>
                     <a:bodyPr/>
@@ -9471,7 +9472,7 @@
                   </a:tcPr>
                 </a:tc>
               </a:tr>
-              <a:tr h="670560">
+              <a:tr h="603504">
                 <a:tc>
                   <a:txBody>
                     <a:bodyPr/>
@@ -9545,7 +9546,7 @@
                   </a:tcPr>
                 </a:tc>
               </a:tr>
-              <a:tr h="670560">
+              <a:tr h="603504">
                 <a:tc>
                   <a:txBody>
                     <a:bodyPr/>
@@ -9619,7 +9620,7 @@
                   </a:tcPr>
                 </a:tc>
               </a:tr>
-              <a:tr h="670560">
+              <a:tr h="603504">
                 <a:tc>
                   <a:txBody>
                     <a:bodyPr/>
@@ -9693,7 +9694,7 @@
                   </a:tcPr>
                 </a:tc>
               </a:tr>
-              <a:tr h="670560">
+              <a:tr h="603504">
                 <a:tc>
                   <a:txBody>
                     <a:bodyPr/>
@@ -9767,7 +9768,7 @@
                   </a:tcPr>
                 </a:tc>
               </a:tr>
-              <a:tr h="670560">
+              <a:tr h="603504">
                 <a:tc>
                   <a:txBody>
                     <a:bodyPr/>
@@ -9841,7 +9842,7 @@
                   </a:tcPr>
                 </a:tc>
               </a:tr>
-              <a:tr h="670560">
+              <a:tr h="603504">
                 <a:tc>
                   <a:txBody>
                     <a:bodyPr/>
@@ -9915,7 +9916,7 @@
                   </a:tcPr>
                 </a:tc>
               </a:tr>
-              <a:tr h="670560">
+              <a:tr h="603504">
                 <a:tc>
                   <a:txBody>
                     <a:bodyPr/>
@@ -9989,7 +9990,7 @@
                   </a:tcPr>
                 </a:tc>
               </a:tr>
-              <a:tr h="670560">
+              <a:tr h="603504">
                 <a:tc>
                   <a:txBody>
                     <a:bodyPr/>
@@ -10004,13 +10005,87 @@
                         </a:defRPr>
                       </a:pPr>
                       <a:r>
+                        <a:t>預測模式</a:t>
+                      </a:r>
+                    </a:p>
+                  </a:txBody>
+                  <a:tcPr anchor="ctr">
+                    <a:solidFill>
+                      <a:srgbClr val="004A58"/>
+                    </a:solidFill>
+                  </a:tcPr>
+                </a:tc>
+                <a:tc>
+                  <a:txBody>
+                    <a:bodyPr/>
+                    <a:lstStyle/>
+                    <a:p>
+                      <a:pPr algn="ctr">
+                        <a:defRPr sz="1500" b="0">
+                          <a:solidFill>
+                            <a:srgbClr val="FFFFFF"/>
+                          </a:solidFill>
+                          <a:latin typeface="Microsoft JhengHei"/>
+                        </a:defRPr>
+                      </a:pPr>
+                      <a:r>
+                        <a:t>—（無預測）</a:t>
+                      </a:r>
+                    </a:p>
+                  </a:txBody>
+                  <a:tcPr anchor="ctr">
+                    <a:solidFill>
+                      <a:srgbClr val="004A58"/>
+                    </a:solidFill>
+                  </a:tcPr>
+                </a:tc>
+                <a:tc>
+                  <a:txBody>
+                    <a:bodyPr/>
+                    <a:lstStyle/>
+                    <a:p>
+                      <a:pPr algn="ctr">
+                        <a:defRPr sz="1500" b="0">
+                          <a:solidFill>
+                            <a:srgbClr val="FFFFFF"/>
+                          </a:solidFill>
+                          <a:latin typeface="Microsoft JhengHei"/>
+                        </a:defRPr>
+                      </a:pPr>
+                      <a:r>
+                        <a:t>重播 demo + 即時線上（ETag 每 5 分鐘）</a:t>
+                      </a:r>
+                    </a:p>
+                  </a:txBody>
+                  <a:tcPr anchor="ctr">
+                    <a:solidFill>
+                      <a:srgbClr val="004A58"/>
+                    </a:solidFill>
+                  </a:tcPr>
+                </a:tc>
+              </a:tr>
+              <a:tr h="603504">
+                <a:tc>
+                  <a:txBody>
+                    <a:bodyPr/>
+                    <a:lstStyle/>
+                    <a:p>
+                      <a:pPr algn="ctr">
+                        <a:defRPr sz="1500" b="0">
+                          <a:solidFill>
+                            <a:srgbClr val="FFFFFF"/>
+                          </a:solidFill>
+                          <a:latin typeface="Microsoft JhengHei"/>
+                        </a:defRPr>
+                      </a:pPr>
+                      <a:r>
                         <a:t>前端</a:t>
                       </a:r>
                     </a:p>
                   </a:txBody>
                   <a:tcPr anchor="ctr">
                     <a:solidFill>
-                      <a:srgbClr val="004A58"/>
+                      <a:srgbClr val="005563"/>
                     </a:solidFill>
                   </a:tcPr>
                 </a:tc>
@@ -10034,7 +10109,7 @@
                   </a:txBody>
                   <a:tcPr anchor="ctr">
                     <a:solidFill>
-                      <a:srgbClr val="004A58"/>
+                      <a:srgbClr val="005563"/>
                     </a:solidFill>
                   </a:tcPr>
                 </a:tc>
@@ -10052,13 +10127,13 @@
                         </a:defRPr>
                       </a:pPr>
                       <a:r>
-                        <a:t>+ 預測圖層、新事件即時通知（地點+定位）</a:t>
-                      </a:r>
-                    </a:p>
-                  </a:txBody>
-                  <a:tcPr anchor="ctr">
-                    <a:solidFill>
-                      <a:srgbClr val="004A58"/>
+                        <a:t>+ 預測圖層、即時通知、預測驗證頁</a:t>
+                      </a:r>
+                    </a:p>
+                  </a:txBody>
+                  <a:tcPr anchor="ctr">
+                    <a:solidFill>
+                      <a:srgbClr val="005563"/>
                     </a:solidFill>
                   </a:tcPr>
                 </a:tc>
@@ -10393,7 +10468,7 @@
               </a:defRPr>
             </a:pPr>
             <a:r>
-              <a:t>結論與未來工作</a:t>
+              <a:t>即時線上模式：從重播升級到真・即時預測</a:t>
             </a:r>
           </a:p>
         </p:txBody>
@@ -10442,6 +10517,340 @@
         </p:nvSpPr>
         <p:spPr>
           <a:xfrm>
+            <a:off x="1371600" y="1463040"/>
+            <a:ext cx="15544800" cy="731520"/>
+          </a:xfrm>
+          <a:prstGeom prst="rect">
+            <a:avLst/>
+          </a:prstGeom>
+          <a:noFill/>
+        </p:spPr>
+        <p:txBody>
+          <a:bodyPr wrap="square">
+            <a:spAutoFit/>
+          </a:bodyPr>
+          <a:lstStyle/>
+          <a:p>
+            <a:pPr algn="l">
+              <a:defRPr sz="2200" b="1">
+                <a:solidFill>
+                  <a:srgbClr val="88FF88"/>
+                </a:solidFill>
+                <a:latin typeface="Microsoft JhengHei"/>
+              </a:defRPr>
+            </a:pPr>
+            <a:r>
+              <a:t>預測服務不再限於重播歷史 — 接高公局 ETag 即時車速，預測「現在往後 30 分鐘」</a:t>
+            </a:r>
+          </a:p>
+        </p:txBody>
+      </p:sp>
+      <p:sp>
+        <p:nvSpPr>
+          <p:cNvPr id="5" name="TextBox 4"/>
+          <p:cNvSpPr txBox="1"/>
+          <p:nvPr/>
+        </p:nvSpPr>
+        <p:spPr>
+          <a:xfrm>
+            <a:off x="1371600" y="2560320"/>
+            <a:ext cx="15544800" cy="4572000"/>
+          </a:xfrm>
+          <a:prstGeom prst="rect">
+            <a:avLst/>
+          </a:prstGeom>
+          <a:noFill/>
+        </p:spPr>
+        <p:txBody>
+          <a:bodyPr wrap="square">
+            <a:spAutoFit/>
+          </a:bodyPr>
+          <a:lstStyle/>
+          <a:p>
+            <a:pPr algn="l">
+              <a:defRPr sz="2000" b="0">
+                <a:solidFill>
+                  <a:srgbClr val="FFFFFF"/>
+                </a:solidFill>
+                <a:latin typeface="Microsoft JhengHei"/>
+              </a:defRPr>
+            </a:pPr>
+          </a:p>
+          <a:p>
+            <a:pPr>
+              <a:spcBef>
+                <a:spcPts val="800"/>
+              </a:spcBef>
+              <a:defRPr sz="2200" b="1">
+                <a:solidFill>
+                  <a:srgbClr val="00AACC"/>
+                </a:solidFill>
+                <a:latin typeface="Microsoft JhengHei"/>
+              </a:defRPr>
+            </a:pPr>
+            <a:r>
+              <a:t>運作流程（每 5 分鐘一輪）</a:t>
+            </a:r>
+          </a:p>
+          <a:p>
+            <a:pPr>
+              <a:spcBef>
+                <a:spcPts val="800"/>
+              </a:spcBef>
+              <a:defRPr sz="1900" b="0">
+                <a:solidFill>
+                  <a:srgbClr val="BBBBBB"/>
+                </a:solidFill>
+                <a:latin typeface="Microsoft JhengHei"/>
+              </a:defRPr>
+            </a:pPr>
+            <a:r>
+              <a:t>抓最新 ETagPairLive → 滾動 60 分鐘視窗 → T-GCN 預測 30 分鐘後 → 寫預測壅塞 → 增量套用路網</a:t>
+            </a:r>
+          </a:p>
+          <a:p>
+            <a:pPr>
+              <a:spcBef>
+                <a:spcPts val="800"/>
+              </a:spcBef>
+              <a:defRPr sz="600" b="0">
+                <a:solidFill>
+                  <a:srgbClr val="FFFFFF"/>
+                </a:solidFill>
+                <a:latin typeface="Microsoft JhengHei"/>
+              </a:defRPr>
+            </a:pPr>
+          </a:p>
+          <a:p>
+            <a:pPr>
+              <a:spcBef>
+                <a:spcPts val="800"/>
+              </a:spcBef>
+              <a:defRPr sz="1900" b="0">
+                <a:solidFill>
+                  <a:srgbClr val="BBBBBB"/>
+                </a:solidFill>
+                <a:latin typeface="Microsoft JhengHei"/>
+              </a:defRPr>
+            </a:pPr>
+            <a:r>
+              <a:t>即時源：motc20/ETag ETagPairLive（門架配對即時車速，與訓練用 M05A 同格式，完美對接）</a:t>
+            </a:r>
+          </a:p>
+          <a:p>
+            <a:pPr>
+              <a:spcBef>
+                <a:spcPts val="800"/>
+              </a:spcBef>
+              <a:defRPr sz="1900" b="0">
+                <a:solidFill>
+                  <a:srgbClr val="BBBBBB"/>
+                </a:solidFill>
+                <a:latin typeface="Microsoft JhengHei"/>
+              </a:defRPr>
+            </a:pPr>
+            <a:r>
+              <a:t>冷啟動：一次抓過去 12 檔填滿視窗，立即可預測，不需枯等一小時</a:t>
+            </a:r>
+          </a:p>
+          <a:p>
+            <a:pPr>
+              <a:spcBef>
+                <a:spcPts val="800"/>
+              </a:spcBef>
+              <a:defRPr sz="1900" b="0">
+                <a:solidFill>
+                  <a:srgbClr val="BBBBBB"/>
+                </a:solidFill>
+                <a:latin typeface="Microsoft JhengHei"/>
+              </a:defRPr>
+            </a:pPr>
+            <a:r>
+              <a:t>只增不改：write_congestion_events 重播/即時共用；新增 /predict/live/start｜stop｜status</a:t>
+            </a:r>
+          </a:p>
+          <a:p>
+            <a:pPr>
+              <a:spcBef>
+                <a:spcPts val="800"/>
+              </a:spcBef>
+              <a:defRPr sz="600" b="0">
+                <a:solidFill>
+                  <a:srgbClr val="FFFFFF"/>
+                </a:solidFill>
+                <a:latin typeface="Microsoft JhengHei"/>
+              </a:defRPr>
+            </a:pPr>
+          </a:p>
+          <a:p>
+            <a:pPr>
+              <a:spcBef>
+                <a:spcPts val="800"/>
+              </a:spcBef>
+              <a:defRPr sz="2000" b="1">
+                <a:solidFill>
+                  <a:srgbClr val="88FF88"/>
+                </a:solidFill>
+                <a:latin typeface="Microsoft JhengHei"/>
+              </a:defRPr>
+            </a:pPr>
+            <a:r>
+              <a:t>實測（8/7 中午）：12/12 步全抓到、8 個預測壅塞、套用 128 條邊</a:t>
+            </a:r>
+          </a:p>
+          <a:p>
+            <a:pPr>
+              <a:spcBef>
+                <a:spcPts val="800"/>
+              </a:spcBef>
+              <a:defRPr sz="1000" b="0">
+                <a:solidFill>
+                  <a:srgbClr val="FFFFFF"/>
+                </a:solidFill>
+                <a:latin typeface="Microsoft JhengHei"/>
+              </a:defRPr>
+            </a:pPr>
+          </a:p>
+          <a:p>
+            <a:pPr>
+              <a:spcBef>
+                <a:spcPts val="800"/>
+              </a:spcBef>
+              <a:defRPr sz="2000" b="1">
+                <a:solidFill>
+                  <a:srgbClr val="00AACC"/>
+                </a:solidFill>
+                <a:latin typeface="Microsoft JhengHei"/>
+              </a:defRPr>
+            </a:pPr>
+            <a:r>
+              <a:t>＋ 預測驗證 demo（/predict/demo）：選任一時間點，看模型預測 vs 實際車速散布圖</a:t>
+            </a:r>
+          </a:p>
+          <a:p>
+            <a:pPr>
+              <a:spcBef>
+                <a:spcPts val="800"/>
+              </a:spcBef>
+              <a:defRPr sz="1700" b="0">
+                <a:solidFill>
+                  <a:srgbClr val="BBBBBB"/>
+                </a:solidFill>
+                <a:latin typeface="Microsoft JhengHei"/>
+              </a:defRPr>
+            </a:pPr>
+            <a:r>
+              <a:t>  點越靠對角線＝預測越準，直接證明模型有效（不只講抽象 MAE）</a:t>
+            </a:r>
+          </a:p>
+        </p:txBody>
+      </p:sp>
+    </p:spTree>
+  </p:cSld>
+  <p:clrMapOvr>
+    <a:masterClrMapping/>
+  </p:clrMapOvr>
+</p:sld>
+</file>
+
+<file path=ppt/slides/slide26.xml><?xml version="1.0" encoding="utf-8"?>
+<p:sld xmlns:a="http://schemas.openxmlformats.org/drawingml/2006/main" xmlns:p="http://schemas.openxmlformats.org/presentationml/2006/main" xmlns:r="http://schemas.openxmlformats.org/officeDocument/2006/relationships">
+  <p:cSld>
+    <p:bg>
+      <p:bgPr>
+        <a:solidFill>
+          <a:srgbClr val="004651"/>
+        </a:solidFill>
+        <a:effectLst/>
+      </p:bgPr>
+    </p:bg>
+    <p:spTree>
+      <p:nvGrpSpPr>
+        <p:cNvPr id="1" name=""/>
+        <p:cNvGrpSpPr/>
+        <p:nvPr/>
+      </p:nvGrpSpPr>
+      <p:grpSpPr/>
+      <p:sp>
+        <p:nvSpPr>
+          <p:cNvPr id="2" name="TextBox 1"/>
+          <p:cNvSpPr txBox="1"/>
+          <p:nvPr/>
+        </p:nvSpPr>
+        <p:spPr>
+          <a:xfrm>
+            <a:off x="914400" y="457200"/>
+            <a:ext cx="14630400" cy="914400"/>
+          </a:xfrm>
+          <a:prstGeom prst="rect">
+            <a:avLst/>
+          </a:prstGeom>
+          <a:noFill/>
+        </p:spPr>
+        <p:txBody>
+          <a:bodyPr wrap="square">
+            <a:spAutoFit/>
+          </a:bodyPr>
+          <a:lstStyle/>
+          <a:p>
+            <a:pPr algn="l">
+              <a:defRPr sz="3600" b="1">
+                <a:solidFill>
+                  <a:srgbClr val="FFFFFF"/>
+                </a:solidFill>
+                <a:latin typeface="Microsoft JhengHei"/>
+              </a:defRPr>
+            </a:pPr>
+            <a:r>
+              <a:t>結論與未來工作</a:t>
+            </a:r>
+          </a:p>
+        </p:txBody>
+      </p:sp>
+      <p:sp>
+        <p:nvSpPr>
+          <p:cNvPr id="3" name="TextBox 2"/>
+          <p:cNvSpPr txBox="1"/>
+          <p:nvPr/>
+        </p:nvSpPr>
+        <p:spPr>
+          <a:xfrm>
+            <a:off x="16916400" y="9418320"/>
+            <a:ext cx="1097280" cy="548640"/>
+          </a:xfrm>
+          <a:prstGeom prst="rect">
+            <a:avLst/>
+          </a:prstGeom>
+          <a:noFill/>
+        </p:spPr>
+        <p:txBody>
+          <a:bodyPr wrap="none">
+            <a:spAutoFit/>
+          </a:bodyPr>
+          <a:lstStyle/>
+          <a:p>
+            <a:pPr algn="r">
+              <a:defRPr sz="1400">
+                <a:solidFill>
+                  <a:srgbClr val="BBBBBB"/>
+                </a:solidFill>
+                <a:latin typeface="Microsoft JhengHei"/>
+              </a:defRPr>
+            </a:pPr>
+            <a:r>
+              <a:t>26</a:t>
+            </a:r>
+          </a:p>
+        </p:txBody>
+      </p:sp>
+      <p:sp>
+        <p:nvSpPr>
+          <p:cNvPr id="4" name="TextBox 3"/>
+          <p:cNvSpPr txBox="1"/>
+          <p:nvPr/>
+        </p:nvSpPr>
+        <p:spPr>
+          <a:xfrm>
             <a:off x="1371600" y="1645920"/>
             <a:ext cx="8686800" cy="7315200"/>
           </a:xfrm>
@@ -10575,6 +10984,22 @@
             </a:pPr>
             <a:r>
               <a:t>  → 計畫書 p.8 全部評估指標都有實測數據</a:t>
+            </a:r>
+          </a:p>
+          <a:p>
+            <a:pPr>
+              <a:spcBef>
+                <a:spcPts val="800"/>
+              </a:spcBef>
+              <a:defRPr sz="2000" b="1">
+                <a:solidFill>
+                  <a:srgbClr val="88FF88"/>
+                </a:solidFill>
+                <a:latin typeface="Microsoft JhengHei"/>
+              </a:defRPr>
+            </a:pPr>
+            <a:r>
+              <a:t>• 即時線上模式：接 ETag 即時車速，預測不再限於重播</a:t>
             </a:r>
           </a:p>
         </p:txBody>
@@ -10655,7 +11080,7 @@
               </a:defRPr>
             </a:pPr>
             <a:r>
-              <a:t>2. 即時 ETag 資料流 → 預測服務轉線上模式</a:t>
+              <a:t>2. 市區 VD 路網擴展</a:t>
             </a:r>
           </a:p>
           <a:p>
@@ -10671,7 +11096,7 @@
               </a:defRPr>
             </a:pPr>
             <a:r>
-              <a:t>3. 市區 VD 路網擴展</a:t>
+              <a:t>3. 方向性上游傳播（衰減曲線為依據）</a:t>
             </a:r>
           </a:p>
           <a:p>
@@ -10687,23 +11112,7 @@
               </a:defRPr>
             </a:pPr>
             <a:r>
-              <a:t>4. 方向性上游傳播（衰減曲線為依據）</a:t>
-            </a:r>
-          </a:p>
-          <a:p>
-            <a:pPr>
-              <a:spcBef>
-                <a:spcPts val="800"/>
-              </a:spcBef>
-              <a:defRPr sz="2000" b="0">
-                <a:solidFill>
-                  <a:srgbClr val="BBBBBB"/>
-                </a:solidFill>
-                <a:latin typeface="Microsoft JhengHei"/>
-              </a:defRPr>
-            </a:pPr>
-            <a:r>
-              <a:t>5. 全事件類型 ground truth 精細化 precision</a:t>
+              <a:t>4. 全事件類型 ground truth 精細化 precision</a:t>
             </a:r>
           </a:p>
         </p:txBody>
@@ -10716,7 +11125,7 @@
 </p:sld>
 </file>
 
-<file path=ppt/slides/slide26.xml><?xml version="1.0" encoding="utf-8"?>
+<file path=ppt/slides/slide27.xml><?xml version="1.0" encoding="utf-8"?>
 <p:sld xmlns:a="http://schemas.openxmlformats.org/drawingml/2006/main" xmlns:p="http://schemas.openxmlformats.org/presentationml/2006/main" xmlns:r="http://schemas.openxmlformats.org/officeDocument/2006/relationships">
   <p:cSld>
     <p:bg>
@@ -10837,7 +11246,7 @@
               </a:defRPr>
             </a:pPr>
             <a:r>
-              <a:t>26</a:t>
+              <a:t>27</a:t>
             </a:r>
           </a:p>
         </p:txBody>
